--- a/madd-far3i/Secondary-Madd.pptx
+++ b/madd-far3i/Secondary-Madd.pptx
@@ -4,6 +4,9 @@
   <p:sldMasterIdLst>
     <p:sldMasterId id="2147483648" r:id="rId1"/>
   </p:sldMasterIdLst>
+  <p:notesMasterIdLst>
+    <p:notesMasterId r:id="rId40"/>
+  </p:notesMasterIdLst>
   <p:sldIdLst>
     <p:sldId id="256" r:id="rId2"/>
     <p:sldId id="257" r:id="rId3"/>
@@ -44,9 +47,6 @@
     <p:sldId id="292" r:id="rId38"/>
     <p:sldId id="293" r:id="rId39"/>
   </p:sldIdLst>
-  <p:notesMasterIdLst>
-    <p:notesMasterId r:id="rId40"/>
-  </p:notesMasterIdLst>
   <p:sldSz cx="9144000" cy="5143500"/>
   <p:notesSz cx="5143500" cy="9144000"/>
   <p:defaultTextStyle>
@@ -4704,9 +4704,6 @@
               </a:rPr>
               <a:t>جَ</a:t>
             </a:r>
-            <a:pPr algn="ctr" indent="0" marL="0">
-              <a:buNone/>
-            </a:pPr>
             <a:r>
               <a:rPr lang="ar-SA" altLang="en-US" sz="12700" dirty="0">
                 <a:solidFill>
@@ -4718,9 +4715,6 @@
               </a:rPr>
               <a:t>آ</a:t>
             </a:r>
-            <a:pPr algn="ctr" indent="0" marL="0">
-              <a:buNone/>
-            </a:pPr>
             <a:r>
               <a:rPr lang="ar-SA" altLang="en-US" sz="12700" dirty="0">
                 <a:solidFill>
@@ -5730,9 +5724,6 @@
               </a:rPr>
               <a:t>إِنَّ</a:t>
             </a:r>
-            <a:pPr algn="ctr" indent="0" marL="0">
-              <a:buNone/>
-            </a:pPr>
             <a:r>
               <a:rPr lang="ar-SA" altLang="en-US" sz="9400" dirty="0">
                 <a:solidFill>
@@ -5744,9 +5735,6 @@
               </a:rPr>
               <a:t>آ</a:t>
             </a:r>
-            <a:pPr algn="ctr" indent="0" marL="0">
-              <a:buNone/>
-            </a:pPr>
             <a:r>
               <a:rPr lang="ar-SA" altLang="en-US" sz="9400" dirty="0">
                 <a:solidFill>
@@ -5758,9 +5746,6 @@
               </a:rPr>
               <a:t> </a:t>
             </a:r>
-            <a:pPr algn="ctr" indent="0" marL="0">
-              <a:buNone/>
-            </a:pPr>
             <a:r>
               <a:rPr lang="ar-SA" altLang="en-US" sz="9400" dirty="0">
                 <a:solidFill>
@@ -6610,9 +6595,6 @@
               </a:rPr>
               <a:t>إِنَّ</a:t>
             </a:r>
-            <a:pPr algn="ctr" indent="0" marL="0">
-              <a:buNone/>
-            </a:pPr>
             <a:r>
               <a:rPr lang="ar-SA" altLang="en-US" sz="2800" dirty="0">
                 <a:solidFill>
@@ -6624,9 +6606,6 @@
               </a:rPr>
               <a:t>آ</a:t>
             </a:r>
-            <a:pPr algn="ctr" indent="0" marL="0">
-              <a:buNone/>
-            </a:pPr>
             <a:r>
               <a:rPr lang="ar-SA" altLang="en-US" sz="2800" dirty="0">
                 <a:solidFill>
@@ -6638,9 +6617,6 @@
               </a:rPr>
               <a:t> </a:t>
             </a:r>
-            <a:pPr algn="ctr" indent="0" marL="0">
-              <a:buNone/>
-            </a:pPr>
             <a:r>
               <a:rPr lang="ar-SA" altLang="en-US" sz="2800" dirty="0">
                 <a:solidFill>
@@ -6652,9 +6628,6 @@
               </a:rPr>
               <a:t>أَ</a:t>
             </a:r>
-            <a:pPr algn="ctr" indent="0" marL="0">
-              <a:buNone/>
-            </a:pPr>
             <a:r>
               <a:rPr lang="ar-SA" altLang="en-US" sz="2800" dirty="0">
                 <a:solidFill>
@@ -7536,9 +7509,6 @@
               </a:rPr>
               <a:t>قُ</a:t>
             </a:r>
-            <a:pPr algn="ctr" indent="0" marL="0">
-              <a:buNone/>
-            </a:pPr>
             <a:r>
               <a:rPr lang="ar-SA" altLang="en-US" sz="2900" dirty="0">
                 <a:solidFill>
@@ -7550,9 +7520,6 @@
               </a:rPr>
               <a:t>وٓ</a:t>
             </a:r>
-            <a:pPr algn="ctr" indent="0" marL="0">
-              <a:buNone/>
-            </a:pPr>
             <a:r>
               <a:rPr lang="ar-SA" altLang="en-US" sz="2900" dirty="0">
                 <a:solidFill>
@@ -7564,9 +7531,6 @@
               </a:rPr>
               <a:t> </a:t>
             </a:r>
-            <a:pPr algn="ctr" indent="0" marL="0">
-              <a:buNone/>
-            </a:pPr>
             <a:r>
               <a:rPr lang="ar-SA" altLang="en-US" sz="2900" dirty="0">
                 <a:solidFill>
@@ -7578,9 +7542,6 @@
               </a:rPr>
               <a:t>أَ</a:t>
             </a:r>
-            <a:pPr algn="ctr" indent="0" marL="0">
-              <a:buNone/>
-            </a:pPr>
             <a:r>
               <a:rPr lang="ar-SA" altLang="en-US" sz="2900" dirty="0">
                 <a:solidFill>
@@ -8487,9 +8448,6 @@
               </a:rPr>
               <a:t>فِ</a:t>
             </a:r>
-            <a:pPr algn="ctr" indent="0" marL="0">
-              <a:buNone/>
-            </a:pPr>
             <a:r>
               <a:rPr lang="ar-SA" altLang="en-US" sz="2800" dirty="0">
                 <a:solidFill>
@@ -8501,9 +8459,6 @@
               </a:rPr>
               <a:t>يٓ</a:t>
             </a:r>
-            <a:pPr algn="ctr" indent="0" marL="0">
-              <a:buNone/>
-            </a:pPr>
             <a:r>
               <a:rPr lang="ar-SA" altLang="en-US" sz="2800" dirty="0">
                 <a:solidFill>
@@ -8515,9 +8470,6 @@
               </a:rPr>
               <a:t> </a:t>
             </a:r>
-            <a:pPr algn="ctr" indent="0" marL="0">
-              <a:buNone/>
-            </a:pPr>
             <a:r>
               <a:rPr lang="ar-SA" altLang="en-US" sz="2800" dirty="0">
                 <a:solidFill>
@@ -8529,9 +8481,6 @@
               </a:rPr>
               <a:t>أَ</a:t>
             </a:r>
-            <a:pPr algn="ctr" indent="0" marL="0">
-              <a:buNone/>
-            </a:pPr>
             <a:r>
               <a:rPr lang="ar-SA" altLang="en-US" sz="2800" dirty="0">
                 <a:solidFill>
@@ -9463,9 +9412,6 @@
               </a:rPr>
               <a:t>مَالَهُ</a:t>
             </a:r>
-            <a:pPr algn="ctr" indent="0" marL="0">
-              <a:buNone/>
-            </a:pPr>
             <a:r>
               <a:rPr lang="ar-SA" altLang="en-US" sz="3700" dirty="0">
                 <a:solidFill>
@@ -9477,9 +9423,6 @@
               </a:rPr>
               <a:t>ۥٓ</a:t>
             </a:r>
-            <a:pPr algn="ctr" indent="0" marL="0">
-              <a:buNone/>
-            </a:pPr>
             <a:r>
               <a:rPr lang="ar-SA" altLang="en-US" sz="3700" dirty="0">
                 <a:solidFill>
@@ -9491,9 +9434,6 @@
               </a:rPr>
               <a:t> </a:t>
             </a:r>
-            <a:pPr algn="ctr" indent="0" marL="0">
-              <a:buNone/>
-            </a:pPr>
             <a:r>
               <a:rPr lang="ar-SA" altLang="en-US" sz="3700" dirty="0">
                 <a:solidFill>
@@ -9505,9 +9445,6 @@
               </a:rPr>
               <a:t>أَ</a:t>
             </a:r>
-            <a:pPr algn="ctr" indent="0" marL="0">
-              <a:buNone/>
-            </a:pPr>
             <a:r>
               <a:rPr lang="ar-SA" altLang="en-US" sz="3700" dirty="0">
                 <a:solidFill>
@@ -10452,9 +10389,6 @@
               </a:rPr>
               <a:t>ءَ</a:t>
             </a:r>
-            <a:pPr algn="ctr" indent="0" marL="0">
-              <a:buNone/>
-            </a:pPr>
             <a:r>
               <a:rPr lang="ar-SA" altLang="en-US" sz="5900" dirty="0">
                 <a:solidFill>
@@ -10466,9 +10400,6 @@
               </a:rPr>
               <a:t>ا</a:t>
             </a:r>
-            <a:pPr algn="ctr" indent="0" marL="0">
-              <a:buNone/>
-            </a:pPr>
             <a:r>
               <a:rPr lang="ar-SA" altLang="en-US" sz="5900" dirty="0">
                 <a:solidFill>
@@ -11337,9 +11268,6 @@
               </a:rPr>
               <a:t>ءَ</a:t>
             </a:r>
-            <a:pPr algn="ctr" indent="0" marL="0">
-              <a:buNone/>
-            </a:pPr>
             <a:r>
               <a:rPr lang="ar-SA" altLang="en-US" sz="3400" dirty="0">
                 <a:solidFill>
@@ -11351,9 +11279,6 @@
               </a:rPr>
               <a:t>ا</a:t>
             </a:r>
-            <a:pPr algn="ctr" indent="0" marL="0">
-              <a:buNone/>
-            </a:pPr>
             <a:r>
               <a:rPr lang="ar-SA" altLang="en-US" sz="3400" dirty="0">
                 <a:solidFill>
@@ -12362,9 +12287,6 @@
               </a:rPr>
               <a:t>إِ</a:t>
             </a:r>
-            <a:pPr algn="ctr" indent="0" marL="0">
-              <a:buNone/>
-            </a:pPr>
             <a:r>
               <a:rPr lang="ar-SA" altLang="en-US" sz="3300" dirty="0">
                 <a:solidFill>
@@ -12376,9 +12298,6 @@
               </a:rPr>
               <a:t>ي</a:t>
             </a:r>
-            <a:pPr algn="ctr" indent="0" marL="0">
-              <a:buNone/>
-            </a:pPr>
             <a:r>
               <a:rPr lang="ar-SA" altLang="en-US" sz="3300" dirty="0">
                 <a:solidFill>
@@ -13260,9 +13179,6 @@
               </a:rPr>
               <a:t>أُ</a:t>
             </a:r>
-            <a:pPr algn="ctr" indent="0" marL="0">
-              <a:buNone/>
-            </a:pPr>
             <a:r>
               <a:rPr lang="ar-SA" altLang="en-US" sz="2900" dirty="0">
                 <a:solidFill>
@@ -13274,9 +13190,6 @@
               </a:rPr>
               <a:t>و</a:t>
             </a:r>
-            <a:pPr algn="ctr" indent="0" marL="0">
-              <a:buNone/>
-            </a:pPr>
             <a:r>
               <a:rPr lang="ar-SA" altLang="en-US" sz="2900" dirty="0">
                 <a:solidFill>
@@ -14236,9 +14149,6 @@
               </a:rPr>
               <a:t>ٱلضَّ</a:t>
             </a:r>
-            <a:pPr algn="ctr" indent="0" marL="0">
-              <a:buNone/>
-            </a:pPr>
             <a:r>
               <a:rPr lang="ar-SA" altLang="en-US" sz="5400" dirty="0">
                 <a:solidFill>
@@ -14250,9 +14160,6 @@
               </a:rPr>
               <a:t>آ</a:t>
             </a:r>
-            <a:pPr algn="ctr" indent="0" marL="0">
-              <a:buNone/>
-            </a:pPr>
             <a:r>
               <a:rPr lang="ar-SA" altLang="en-US" sz="5400" dirty="0">
                 <a:solidFill>
@@ -14264,9 +14171,6 @@
               </a:rPr>
               <a:t>لِّ</a:t>
             </a:r>
-            <a:pPr algn="ctr" indent="0" marL="0">
-              <a:buNone/>
-            </a:pPr>
             <a:r>
               <a:rPr lang="ar-SA" altLang="en-US" sz="5400" dirty="0">
                 <a:solidFill>
@@ -16813,9 +16717,6 @@
               </a:rPr>
               <a:t>وَلَا ٱلضَّ</a:t>
             </a:r>
-            <a:pPr algn="ctr" indent="0" marL="0">
-              <a:buNone/>
-            </a:pPr>
             <a:r>
               <a:rPr lang="ar-SA" altLang="en-US" sz="3000" dirty="0">
                 <a:solidFill>
@@ -16827,9 +16728,6 @@
               </a:rPr>
               <a:t>آ</a:t>
             </a:r>
-            <a:pPr algn="ctr" indent="0" marL="0">
-              <a:buNone/>
-            </a:pPr>
             <a:r>
               <a:rPr lang="ar-SA" altLang="en-US" sz="3000" dirty="0">
                 <a:solidFill>
@@ -16841,9 +16739,6 @@
               </a:rPr>
               <a:t>لِّ</a:t>
             </a:r>
-            <a:pPr algn="ctr" indent="0" marL="0">
-              <a:buNone/>
-            </a:pPr>
             <a:r>
               <a:rPr lang="ar-SA" altLang="en-US" sz="3000" dirty="0">
                 <a:solidFill>
@@ -17735,9 +17630,6 @@
               </a:rPr>
               <a:t>ٱلۡحَ</a:t>
             </a:r>
-            <a:pPr algn="ctr" indent="0" marL="0">
-              <a:buNone/>
-            </a:pPr>
             <a:r>
               <a:rPr lang="ar-SA" altLang="en-US" sz="3600" dirty="0">
                 <a:solidFill>
@@ -17749,9 +17641,6 @@
               </a:rPr>
               <a:t>آ</a:t>
             </a:r>
-            <a:pPr algn="ctr" indent="0" marL="0">
-              <a:buNone/>
-            </a:pPr>
             <a:r>
               <a:rPr lang="ar-SA" altLang="en-US" sz="3600" dirty="0">
                 <a:solidFill>
@@ -17763,9 +17652,6 @@
               </a:rPr>
               <a:t>قَّ</a:t>
             </a:r>
-            <a:pPr algn="ctr" indent="0" marL="0">
-              <a:buNone/>
-            </a:pPr>
             <a:r>
               <a:rPr lang="ar-SA" altLang="en-US" sz="3600" dirty="0">
                 <a:solidFill>
@@ -19844,9 +19730,6 @@
               </a:rPr>
               <a:t>أَلِفۡ لَ</a:t>
             </a:r>
-            <a:pPr algn="ctr" indent="0" marL="0">
-              <a:buNone/>
-            </a:pPr>
             <a:r>
               <a:rPr lang="ar-SA" altLang="en-US" sz="2900" dirty="0">
                 <a:solidFill>
@@ -19858,9 +19741,6 @@
               </a:rPr>
               <a:t>آ</a:t>
             </a:r>
-            <a:pPr algn="ctr" indent="0" marL="0">
-              <a:buNone/>
-            </a:pPr>
             <a:r>
               <a:rPr lang="ar-SA" altLang="en-US" sz="2900" dirty="0">
                 <a:solidFill>
@@ -19872,9 +19752,6 @@
               </a:rPr>
               <a:t>مۡ</a:t>
             </a:r>
-            <a:pPr algn="ctr" indent="0" marL="0">
-              <a:buNone/>
-            </a:pPr>
             <a:r>
               <a:rPr lang="ar-SA" altLang="en-US" sz="2900" dirty="0">
                 <a:solidFill>
@@ -19886,9 +19763,6 @@
               </a:rPr>
               <a:t> مِّ</a:t>
             </a:r>
-            <a:pPr algn="ctr" indent="0" marL="0">
-              <a:buNone/>
-            </a:pPr>
             <a:r>
               <a:rPr lang="ar-SA" altLang="en-US" sz="2900" dirty="0">
                 <a:solidFill>
@@ -19900,9 +19774,6 @@
               </a:rPr>
               <a:t>ي</a:t>
             </a:r>
-            <a:pPr algn="ctr" indent="0" marL="0">
-              <a:buNone/>
-            </a:pPr>
             <a:r>
               <a:rPr lang="ar-SA" altLang="en-US" sz="2900" dirty="0">
                 <a:solidFill>
@@ -20876,9 +20747,6 @@
               </a:rPr>
               <a:t>ٱلرَّحِ</a:t>
             </a:r>
-            <a:pPr algn="ctr" indent="0" marL="0">
-              <a:buNone/>
-            </a:pPr>
             <a:r>
               <a:rPr lang="ar-SA" altLang="en-US" sz="4800" dirty="0">
                 <a:solidFill>
@@ -20890,9 +20758,6 @@
               </a:rPr>
               <a:t>ي</a:t>
             </a:r>
-            <a:pPr algn="ctr" indent="0" marL="0">
-              <a:buNone/>
-            </a:pPr>
             <a:r>
               <a:rPr lang="ar-SA" altLang="en-US" sz="4800" dirty="0">
                 <a:solidFill>
@@ -21640,9 +21505,6 @@
               </a:rPr>
               <a:t>ٱلرَّحِ</a:t>
             </a:r>
-            <a:pPr algn="ctr" indent="0" marL="0">
-              <a:buNone/>
-            </a:pPr>
             <a:r>
               <a:rPr lang="ar-SA" altLang="en-US" sz="3300" dirty="0">
                 <a:solidFill>
@@ -21654,9 +21516,6 @@
               </a:rPr>
               <a:t>ي</a:t>
             </a:r>
-            <a:pPr algn="ctr" indent="0" marL="0">
-              <a:buNone/>
-            </a:pPr>
             <a:r>
               <a:rPr lang="ar-SA" altLang="en-US" sz="3300" dirty="0">
                 <a:solidFill>
@@ -22588,9 +22447,6 @@
               </a:rPr>
               <a:t>نَسۡتَعِ</a:t>
             </a:r>
-            <a:pPr algn="ctr" indent="0" marL="0">
-              <a:buNone/>
-            </a:pPr>
             <a:r>
               <a:rPr lang="ar-SA" altLang="en-US" sz="3800" dirty="0">
                 <a:solidFill>
@@ -22602,9 +22458,6 @@
               </a:rPr>
               <a:t>ي</a:t>
             </a:r>
-            <a:pPr algn="ctr" indent="0" marL="0">
-              <a:buNone/>
-            </a:pPr>
             <a:r>
               <a:rPr lang="ar-SA" altLang="en-US" sz="3800" dirty="0">
                 <a:solidFill>
@@ -23496,9 +23349,6 @@
               </a:rPr>
               <a:t>يَعۡلَمُ</a:t>
             </a:r>
-            <a:pPr algn="ctr" indent="0" marL="0">
-              <a:buNone/>
-            </a:pPr>
             <a:r>
               <a:rPr lang="ar-SA" altLang="en-US" sz="3500" dirty="0">
                 <a:solidFill>
@@ -23510,9 +23360,6 @@
               </a:rPr>
               <a:t>و</a:t>
             </a:r>
-            <a:pPr algn="ctr" indent="0" marL="0">
-              <a:buNone/>
-            </a:pPr>
             <a:r>
               <a:rPr lang="ar-SA" altLang="en-US" sz="3500" dirty="0">
                 <a:solidFill>
@@ -24647,9 +24494,6 @@
               </a:rPr>
               <a:t>قُرَ</a:t>
             </a:r>
-            <a:pPr algn="ctr" indent="0" marL="0">
-              <a:buNone/>
-            </a:pPr>
             <a:r>
               <a:rPr lang="ar-SA" altLang="en-US" sz="4600" dirty="0">
                 <a:solidFill>
@@ -24661,9 +24505,6 @@
               </a:rPr>
               <a:t>يۡ</a:t>
             </a:r>
-            <a:pPr algn="ctr" indent="0" marL="0">
-              <a:buNone/>
-            </a:pPr>
             <a:r>
               <a:rPr lang="ar-SA" altLang="en-US" sz="4600" dirty="0">
                 <a:solidFill>
@@ -25459,9 +25300,6 @@
               </a:rPr>
               <a:t>قُرَ</a:t>
             </a:r>
-            <a:pPr algn="ctr" indent="0" marL="0">
-              <a:buNone/>
-            </a:pPr>
             <a:r>
               <a:rPr lang="ar-SA" altLang="en-US" sz="3300" dirty="0">
                 <a:solidFill>
@@ -25473,9 +25311,6 @@
               </a:rPr>
               <a:t>يۡ</a:t>
             </a:r>
-            <a:pPr algn="ctr" indent="0" marL="0">
-              <a:buNone/>
-            </a:pPr>
             <a:r>
               <a:rPr lang="ar-SA" altLang="en-US" sz="3300" dirty="0">
                 <a:solidFill>
@@ -27104,9 +26939,6 @@
               </a:rPr>
               <a:t>خَ</a:t>
             </a:r>
-            <a:pPr algn="ctr" indent="0" marL="0">
-              <a:buNone/>
-            </a:pPr>
             <a:r>
               <a:rPr lang="ar-SA" altLang="en-US" sz="3300" dirty="0">
                 <a:solidFill>
@@ -27118,9 +26950,6 @@
               </a:rPr>
               <a:t>وۡ</a:t>
             </a:r>
-            <a:pPr algn="ctr" indent="0" marL="0">
-              <a:buNone/>
-            </a:pPr>
             <a:r>
               <a:rPr lang="ar-SA" altLang="en-US" sz="3300" dirty="0">
                 <a:solidFill>
@@ -28027,9 +27856,6 @@
               </a:rPr>
               <a:t>ٱلۡبَ</a:t>
             </a:r>
-            <a:pPr algn="ctr" indent="0" marL="0">
-              <a:buNone/>
-            </a:pPr>
             <a:r>
               <a:rPr lang="ar-SA" altLang="en-US" sz="3400" dirty="0">
                 <a:solidFill>
@@ -28041,9 +27867,6 @@
               </a:rPr>
               <a:t>يۡ</a:t>
             </a:r>
-            <a:pPr algn="ctr" indent="0" marL="0">
-              <a:buNone/>
-            </a:pPr>
             <a:r>
               <a:rPr lang="ar-SA" altLang="en-US" sz="3400" dirty="0">
                 <a:solidFill>
@@ -28975,9 +28798,6 @@
               </a:rPr>
               <a:t>عَلِيمَ</a:t>
             </a:r>
-            <a:pPr algn="ctr" indent="0" marL="0">
-              <a:buNone/>
-            </a:pPr>
             <a:r>
               <a:rPr lang="ar-SA" altLang="en-US" sz="4400" dirty="0">
                 <a:solidFill>
@@ -30899,9 +30719,6 @@
               </a:rPr>
               <a:t>يَٰٓ </a:t>
             </a:r>
-            <a:pPr algn="ctr" indent="0" marL="0">
-              <a:buNone/>
-            </a:pPr>
             <a:r>
               <a:rPr lang="ar-SA" altLang="en-US" sz="2800" dirty="0">
                 <a:solidFill>
@@ -30913,9 +30730,6 @@
               </a:rPr>
               <a:t>أَ</a:t>
             </a:r>
-            <a:pPr algn="ctr" indent="0" marL="0">
-              <a:buNone/>
-            </a:pPr>
             <a:r>
               <a:rPr lang="ar-SA" altLang="en-US" sz="2800" dirty="0">
                 <a:solidFill>
@@ -31924,9 +31738,6 @@
               </a:rPr>
               <a:t>ٱلطَّ</a:t>
             </a:r>
-            <a:pPr algn="ctr" indent="0" marL="0">
-              <a:buNone/>
-            </a:pPr>
             <a:r>
               <a:rPr lang="ar-SA" altLang="en-US" sz="3400" dirty="0">
                 <a:solidFill>
@@ -31938,9 +31749,6 @@
               </a:rPr>
               <a:t>آ</a:t>
             </a:r>
-            <a:pPr algn="ctr" indent="0" marL="0">
-              <a:buNone/>
-            </a:pPr>
             <a:r>
               <a:rPr lang="ar-SA" altLang="en-US" sz="3400" dirty="0">
                 <a:solidFill>
@@ -31952,9 +31760,6 @@
               </a:rPr>
               <a:t>مَّ</a:t>
             </a:r>
-            <a:pPr algn="ctr" indent="0" marL="0">
-              <a:buNone/>
-            </a:pPr>
             <a:r>
               <a:rPr lang="ar-SA" altLang="en-US" sz="3400" dirty="0">
                 <a:solidFill>
@@ -32836,9 +32641,6 @@
               </a:rPr>
               <a:t>أُ</a:t>
             </a:r>
-            <a:pPr algn="ctr" indent="0" marL="0">
-              <a:buNone/>
-            </a:pPr>
             <a:r>
               <a:rPr lang="ar-SA" altLang="en-US" sz="2600" dirty="0">
                 <a:solidFill>
@@ -32850,9 +32652,6 @@
               </a:rPr>
               <a:t>و</a:t>
             </a:r>
-            <a:pPr algn="ctr" indent="0" marL="0">
-              <a:buNone/>
-            </a:pPr>
             <a:r>
               <a:rPr lang="ar-SA" altLang="en-US" sz="2600" dirty="0">
                 <a:solidFill>
@@ -33759,9 +33558,6 @@
               </a:rPr>
               <a:t>ٱلۡمُفۡلِحُ</a:t>
             </a:r>
-            <a:pPr algn="ctr" indent="0" marL="0">
-              <a:buNone/>
-            </a:pPr>
             <a:r>
               <a:rPr lang="ar-SA" altLang="en-US" sz="3300" dirty="0">
                 <a:solidFill>
@@ -33773,9 +33569,6 @@
               </a:rPr>
               <a:t>و</a:t>
             </a:r>
-            <a:pPr algn="ctr" indent="0" marL="0">
-              <a:buNone/>
-            </a:pPr>
             <a:r>
               <a:rPr lang="ar-SA" altLang="en-US" sz="3300" dirty="0">
                 <a:solidFill>
@@ -35829,9 +35622,6 @@
               </a:rPr>
               <a:t>سَ</a:t>
             </a:r>
-            <a:pPr algn="ctr" indent="0" marL="0">
-              <a:buNone/>
-            </a:pPr>
             <a:r>
               <a:rPr lang="ar-SA" altLang="en-US" sz="14100" dirty="0">
                 <a:solidFill>
@@ -36773,9 +36563,6 @@
               </a:rPr>
               <a:t>جَ</a:t>
             </a:r>
-            <a:pPr algn="ctr" indent="0" marL="0">
-              <a:buNone/>
-            </a:pPr>
             <a:r>
               <a:rPr lang="ar-SA" altLang="en-US" sz="12700" dirty="0">
                 <a:solidFill>
@@ -36787,9 +36574,6 @@
               </a:rPr>
               <a:t>آ</a:t>
             </a:r>
-            <a:pPr algn="ctr" indent="0" marL="0">
-              <a:buNone/>
-            </a:pPr>
             <a:r>
               <a:rPr lang="ar-SA" altLang="en-US" sz="12700" dirty="0">
                 <a:solidFill>
@@ -37512,9 +37296,6 @@
               </a:rPr>
               <a:t>جَ</a:t>
             </a:r>
-            <a:pPr algn="ctr" indent="0" marL="0">
-              <a:buNone/>
-            </a:pPr>
             <a:r>
               <a:rPr lang="ar-SA" altLang="en-US" sz="3800" dirty="0">
                 <a:solidFill>
@@ -37526,9 +37307,6 @@
               </a:rPr>
               <a:t>آ</a:t>
             </a:r>
-            <a:pPr algn="ctr" indent="0" marL="0">
-              <a:buNone/>
-            </a:pPr>
             <a:r>
               <a:rPr lang="ar-SA" altLang="en-US" sz="3800" dirty="0">
                 <a:solidFill>
@@ -38435,9 +38213,6 @@
               </a:rPr>
               <a:t>ٱلسَّمَ</a:t>
             </a:r>
-            <a:pPr algn="ctr" indent="0" marL="0">
-              <a:buNone/>
-            </a:pPr>
             <a:r>
               <a:rPr lang="ar-SA" altLang="en-US" sz="3800" dirty="0">
                 <a:solidFill>
@@ -38449,9 +38224,6 @@
               </a:rPr>
               <a:t>آ</a:t>
             </a:r>
-            <a:pPr algn="ctr" indent="0" marL="0">
-              <a:buNone/>
-            </a:pPr>
             <a:r>
               <a:rPr lang="ar-SA" altLang="en-US" sz="3800" dirty="0">
                 <a:solidFill>
@@ -39383,9 +39155,6 @@
               </a:rPr>
               <a:t>سِ</a:t>
             </a:r>
-            <a:pPr algn="ctr" indent="0" marL="0">
-              <a:buNone/>
-            </a:pPr>
             <a:r>
               <a:rPr lang="ar-SA" altLang="en-US" sz="3700" dirty="0">
                 <a:solidFill>
@@ -39397,9 +39166,6 @@
               </a:rPr>
               <a:t>يٓ</a:t>
             </a:r>
-            <a:pPr algn="ctr" indent="0" marL="0">
-              <a:buNone/>
-            </a:pPr>
             <a:r>
               <a:rPr lang="ar-SA" altLang="en-US" sz="3700" dirty="0">
                 <a:solidFill>
@@ -39411,9 +39177,6 @@
               </a:rPr>
               <a:t>ءَ</a:t>
             </a:r>
-            <a:pPr algn="ctr" indent="0" marL="0">
-              <a:buNone/>
-            </a:pPr>
             <a:r>
               <a:rPr lang="ar-SA" altLang="en-US" sz="3700" dirty="0">
                 <a:solidFill>
